--- a/figures_tables/Supplemental_Figures/Supp_Figures.pptx
+++ b/figures_tables/Supplemental_Figures/Supp_Figures.pptx
@@ -3099,12 +3099,152 @@
           </a:prstGeom>
         </p:spPr>
       </p:pic>
+      <p:sp>
+        <p:nvSpPr>
+          <p:cNvPr id="8" name="TextBox 7">
+            <a:extLst>
+              <a:ext uri="{FF2B5EF4-FFF2-40B4-BE49-F238E27FC236}">
+                <a16:creationId xmlns:a16="http://schemas.microsoft.com/office/drawing/2014/main" id="{91841A04-5509-56EB-0B34-5214B10A559E}"/>
+              </a:ext>
+            </a:extLst>
+          </p:cNvPr>
+          <p:cNvSpPr txBox="1"/>
+          <p:nvPr/>
+        </p:nvSpPr>
+        <p:spPr>
+          <a:xfrm>
+            <a:off x="0" y="0"/>
+            <a:ext cx="372628" cy="307777"/>
+          </a:xfrm>
+          <a:prstGeom prst="rect">
+            <a:avLst/>
+          </a:prstGeom>
+          <a:noFill/>
+        </p:spPr>
+        <p:txBody>
+          <a:bodyPr wrap="square" rtlCol="0">
+            <a:spAutoFit/>
+          </a:bodyPr>
+          <a:lstStyle/>
+          <a:p>
+            <a:r>
+              <a:rPr lang="en-US" sz="1400" b="1" dirty="0"/>
+              <a:t>a</a:t>
+            </a:r>
+          </a:p>
+        </p:txBody>
+      </p:sp>
+      <p:sp>
+        <p:nvSpPr>
+          <p:cNvPr id="9" name="TextBox 8">
+            <a:extLst>
+              <a:ext uri="{FF2B5EF4-FFF2-40B4-BE49-F238E27FC236}">
+                <a16:creationId xmlns:a16="http://schemas.microsoft.com/office/drawing/2014/main" id="{1920FFFD-FB21-512D-0CA0-EE5F1580C688}"/>
+              </a:ext>
+            </a:extLst>
+          </p:cNvPr>
+          <p:cNvSpPr txBox="1"/>
+          <p:nvPr/>
+        </p:nvSpPr>
+        <p:spPr>
+          <a:xfrm>
+            <a:off x="0" y="1891562"/>
+            <a:ext cx="372628" cy="307777"/>
+          </a:xfrm>
+          <a:prstGeom prst="rect">
+            <a:avLst/>
+          </a:prstGeom>
+          <a:noFill/>
+        </p:spPr>
+        <p:txBody>
+          <a:bodyPr wrap="square" rtlCol="0">
+            <a:spAutoFit/>
+          </a:bodyPr>
+          <a:lstStyle/>
+          <a:p>
+            <a:r>
+              <a:rPr lang="en-US" sz="1400" b="1" dirty="0"/>
+              <a:t>b</a:t>
+            </a:r>
+          </a:p>
+        </p:txBody>
+      </p:sp>
+      <p:sp>
+        <p:nvSpPr>
+          <p:cNvPr id="10" name="TextBox 9">
+            <a:extLst>
+              <a:ext uri="{FF2B5EF4-FFF2-40B4-BE49-F238E27FC236}">
+                <a16:creationId xmlns:a16="http://schemas.microsoft.com/office/drawing/2014/main" id="{BC6CF565-2466-C70C-0132-AFB00E6092C5}"/>
+              </a:ext>
+            </a:extLst>
+          </p:cNvPr>
+          <p:cNvSpPr txBox="1"/>
+          <p:nvPr/>
+        </p:nvSpPr>
+        <p:spPr>
+          <a:xfrm>
+            <a:off x="0" y="5400183"/>
+            <a:ext cx="372628" cy="307777"/>
+          </a:xfrm>
+          <a:prstGeom prst="rect">
+            <a:avLst/>
+          </a:prstGeom>
+          <a:noFill/>
+        </p:spPr>
+        <p:txBody>
+          <a:bodyPr wrap="square" rtlCol="0">
+            <a:spAutoFit/>
+          </a:bodyPr>
+          <a:lstStyle/>
+          <a:p>
+            <a:r>
+              <a:rPr lang="en-US" sz="1400" b="1" dirty="0"/>
+              <a:t>c</a:t>
+            </a:r>
+          </a:p>
+        </p:txBody>
+      </p:sp>
+      <p:sp>
+        <p:nvSpPr>
+          <p:cNvPr id="11" name="TextBox 10">
+            <a:extLst>
+              <a:ext uri="{FF2B5EF4-FFF2-40B4-BE49-F238E27FC236}">
+                <a16:creationId xmlns:a16="http://schemas.microsoft.com/office/drawing/2014/main" id="{BFE5FE02-2E92-B04F-D9A3-5C5205DEA6AC}"/>
+              </a:ext>
+            </a:extLst>
+          </p:cNvPr>
+          <p:cNvSpPr txBox="1"/>
+          <p:nvPr/>
+        </p:nvSpPr>
+        <p:spPr>
+          <a:xfrm>
+            <a:off x="0" y="7280346"/>
+            <a:ext cx="372628" cy="307777"/>
+          </a:xfrm>
+          <a:prstGeom prst="rect">
+            <a:avLst/>
+          </a:prstGeom>
+          <a:noFill/>
+        </p:spPr>
+        <p:txBody>
+          <a:bodyPr wrap="square" rtlCol="0">
+            <a:spAutoFit/>
+          </a:bodyPr>
+          <a:lstStyle/>
+          <a:p>
+            <a:r>
+              <a:rPr lang="en-US" sz="1400" b="1" dirty="0"/>
+              <a:t>d</a:t>
+            </a:r>
+          </a:p>
+        </p:txBody>
+      </p:sp>
       <p:pic>
         <p:nvPicPr>
-          <p:cNvPr id="6" name="Picture 5">
+          <p:cNvPr id="13" name="Picture 12">
             <a:extLst>
               <a:ext uri="{FF2B5EF4-FFF2-40B4-BE49-F238E27FC236}">
-                <a16:creationId xmlns:a16="http://schemas.microsoft.com/office/drawing/2014/main" id="{3A66B98A-7A3A-8268-2208-83127BC91A48}"/>
+                <a16:creationId xmlns:a16="http://schemas.microsoft.com/office/drawing/2014/main" id="{7C184FD6-0D22-A3B7-1BC6-E85DA4F2A2C1}"/>
               </a:ext>
             </a:extLst>
           </p:cNvPr>
@@ -3121,8 +3261,8 @@
         </p:blipFill>
         <p:spPr>
           <a:xfrm>
-            <a:off x="372627" y="5480527"/>
-            <a:ext cx="3850061" cy="1509946"/>
+            <a:off x="372627" y="5601764"/>
+            <a:ext cx="3850062" cy="1509946"/>
           </a:xfrm>
           <a:prstGeom prst="rect">
             <a:avLst/>
@@ -3131,10 +3271,10 @@
       </p:pic>
       <p:pic>
         <p:nvPicPr>
-          <p:cNvPr id="7" name="Picture 6">
+          <p:cNvPr id="15" name="Picture 14">
             <a:extLst>
               <a:ext uri="{FF2B5EF4-FFF2-40B4-BE49-F238E27FC236}">
-                <a16:creationId xmlns:a16="http://schemas.microsoft.com/office/drawing/2014/main" id="{BAE405FE-4FC0-CBD8-10D3-275179A7771C}"/>
+                <a16:creationId xmlns:a16="http://schemas.microsoft.com/office/drawing/2014/main" id="{AC8D836A-172E-B056-D84F-EB0440CA122A}"/>
               </a:ext>
             </a:extLst>
           </p:cNvPr>
@@ -3151,7 +3291,7 @@
         </p:blipFill>
         <p:spPr>
           <a:xfrm>
-            <a:off x="269485" y="7495711"/>
+            <a:off x="282011" y="7588123"/>
             <a:ext cx="3850062" cy="1509946"/>
           </a:xfrm>
           <a:prstGeom prst="rect">
@@ -3159,146 +3299,6 @@
           </a:prstGeom>
         </p:spPr>
       </p:pic>
-      <p:sp>
-        <p:nvSpPr>
-          <p:cNvPr id="8" name="TextBox 7">
-            <a:extLst>
-              <a:ext uri="{FF2B5EF4-FFF2-40B4-BE49-F238E27FC236}">
-                <a16:creationId xmlns:a16="http://schemas.microsoft.com/office/drawing/2014/main" id="{91841A04-5509-56EB-0B34-5214B10A559E}"/>
-              </a:ext>
-            </a:extLst>
-          </p:cNvPr>
-          <p:cNvSpPr txBox="1"/>
-          <p:nvPr/>
-        </p:nvSpPr>
-        <p:spPr>
-          <a:xfrm>
-            <a:off x="0" y="0"/>
-            <a:ext cx="372628" cy="307777"/>
-          </a:xfrm>
-          <a:prstGeom prst="rect">
-            <a:avLst/>
-          </a:prstGeom>
-          <a:noFill/>
-        </p:spPr>
-        <p:txBody>
-          <a:bodyPr wrap="square" rtlCol="0">
-            <a:spAutoFit/>
-          </a:bodyPr>
-          <a:lstStyle/>
-          <a:p>
-            <a:r>
-              <a:rPr lang="en-US" sz="1400" b="1" dirty="0"/>
-              <a:t>a</a:t>
-            </a:r>
-          </a:p>
-        </p:txBody>
-      </p:sp>
-      <p:sp>
-        <p:nvSpPr>
-          <p:cNvPr id="9" name="TextBox 8">
-            <a:extLst>
-              <a:ext uri="{FF2B5EF4-FFF2-40B4-BE49-F238E27FC236}">
-                <a16:creationId xmlns:a16="http://schemas.microsoft.com/office/drawing/2014/main" id="{1920FFFD-FB21-512D-0CA0-EE5F1580C688}"/>
-              </a:ext>
-            </a:extLst>
-          </p:cNvPr>
-          <p:cNvSpPr txBox="1"/>
-          <p:nvPr/>
-        </p:nvSpPr>
-        <p:spPr>
-          <a:xfrm>
-            <a:off x="0" y="1891562"/>
-            <a:ext cx="372628" cy="307777"/>
-          </a:xfrm>
-          <a:prstGeom prst="rect">
-            <a:avLst/>
-          </a:prstGeom>
-          <a:noFill/>
-        </p:spPr>
-        <p:txBody>
-          <a:bodyPr wrap="square" rtlCol="0">
-            <a:spAutoFit/>
-          </a:bodyPr>
-          <a:lstStyle/>
-          <a:p>
-            <a:r>
-              <a:rPr lang="en-US" sz="1400" b="1" dirty="0"/>
-              <a:t>b</a:t>
-            </a:r>
-          </a:p>
-        </p:txBody>
-      </p:sp>
-      <p:sp>
-        <p:nvSpPr>
-          <p:cNvPr id="10" name="TextBox 9">
-            <a:extLst>
-              <a:ext uri="{FF2B5EF4-FFF2-40B4-BE49-F238E27FC236}">
-                <a16:creationId xmlns:a16="http://schemas.microsoft.com/office/drawing/2014/main" id="{BC6CF565-2466-C70C-0132-AFB00E6092C5}"/>
-              </a:ext>
-            </a:extLst>
-          </p:cNvPr>
-          <p:cNvSpPr txBox="1"/>
-          <p:nvPr/>
-        </p:nvSpPr>
-        <p:spPr>
-          <a:xfrm>
-            <a:off x="0" y="5400183"/>
-            <a:ext cx="372628" cy="307777"/>
-          </a:xfrm>
-          <a:prstGeom prst="rect">
-            <a:avLst/>
-          </a:prstGeom>
-          <a:noFill/>
-        </p:spPr>
-        <p:txBody>
-          <a:bodyPr wrap="square" rtlCol="0">
-            <a:spAutoFit/>
-          </a:bodyPr>
-          <a:lstStyle/>
-          <a:p>
-            <a:r>
-              <a:rPr lang="en-US" sz="1400" b="1" dirty="0"/>
-              <a:t>c</a:t>
-            </a:r>
-          </a:p>
-        </p:txBody>
-      </p:sp>
-      <p:sp>
-        <p:nvSpPr>
-          <p:cNvPr id="11" name="TextBox 10">
-            <a:extLst>
-              <a:ext uri="{FF2B5EF4-FFF2-40B4-BE49-F238E27FC236}">
-                <a16:creationId xmlns:a16="http://schemas.microsoft.com/office/drawing/2014/main" id="{BFE5FE02-2E92-B04F-D9A3-5C5205DEA6AC}"/>
-              </a:ext>
-            </a:extLst>
-          </p:cNvPr>
-          <p:cNvSpPr txBox="1"/>
-          <p:nvPr/>
-        </p:nvSpPr>
-        <p:spPr>
-          <a:xfrm>
-            <a:off x="0" y="7280346"/>
-            <a:ext cx="372628" cy="307777"/>
-          </a:xfrm>
-          <a:prstGeom prst="rect">
-            <a:avLst/>
-          </a:prstGeom>
-          <a:noFill/>
-        </p:spPr>
-        <p:txBody>
-          <a:bodyPr wrap="square" rtlCol="0">
-            <a:spAutoFit/>
-          </a:bodyPr>
-          <a:lstStyle/>
-          <a:p>
-            <a:r>
-              <a:rPr lang="en-US" sz="1400" b="1" dirty="0"/>
-              <a:t>d</a:t>
-            </a:r>
-          </a:p>
-        </p:txBody>
-      </p:sp>
     </p:spTree>
     <p:extLst>
       <p:ext uri="{BB962C8B-B14F-4D97-AF65-F5344CB8AC3E}">
@@ -6113,13 +6113,8 @@
             </a:r>
             <a:r>
               <a:rPr lang="en-CA" sz="1100" dirty="0"/>
-              <a:t> transcriptome). Positive NES: enriched in Sensitive models; negative NES: enriched in </a:t>
-            </a:r>
-            <a:r>
-              <a:rPr lang="en-CA" sz="1100"/>
-              <a:t>Resistant models (FDR q &lt; 0.05) .</a:t>
-            </a:r>
-            <a:endParaRPr lang="en-CA" sz="1100" dirty="0"/>
+              <a:t> transcriptome). Positive NES: enriched in Sensitive models; negative NES: enriched in Resistant models (FDR q &lt; 0.05) .</a:t>
+            </a:r>
           </a:p>
         </p:txBody>
       </p:sp>

--- a/figures_tables/Supplemental_Figures/Supp_Figures.pptx
+++ b/figures_tables/Supplemental_Figures/Supp_Figures.pptx
@@ -5061,7 +5061,7 @@
         </p:blipFill>
         <p:spPr>
           <a:xfrm>
-            <a:off x="137173" y="7598245"/>
+            <a:off x="3592210" y="7541591"/>
             <a:ext cx="2510544" cy="1555204"/>
           </a:xfrm>
           <a:prstGeom prst="rect">
@@ -5083,7 +5083,72 @@
         </p:nvSpPr>
         <p:spPr>
           <a:xfrm>
-            <a:off x="51717" y="7444356"/>
+            <a:off x="3592210" y="7444356"/>
+            <a:ext cx="645459" cy="307777"/>
+          </a:xfrm>
+          <a:prstGeom prst="rect">
+            <a:avLst/>
+          </a:prstGeom>
+          <a:noFill/>
+        </p:spPr>
+        <p:txBody>
+          <a:bodyPr wrap="square" rtlCol="0">
+            <a:spAutoFit/>
+          </a:bodyPr>
+          <a:lstStyle/>
+          <a:p>
+            <a:r>
+              <a:rPr lang="en-US" sz="1400" b="1" dirty="0"/>
+              <a:t>e</a:t>
+            </a:r>
+          </a:p>
+        </p:txBody>
+      </p:sp>
+      <p:pic>
+        <p:nvPicPr>
+          <p:cNvPr id="26" name="Picture 25">
+            <a:extLst>
+              <a:ext uri="{FF2B5EF4-FFF2-40B4-BE49-F238E27FC236}">
+                <a16:creationId xmlns:a16="http://schemas.microsoft.com/office/drawing/2014/main" id="{91B2BBDF-4430-FCBF-4C0F-66007C2E0074}"/>
+              </a:ext>
+            </a:extLst>
+          </p:cNvPr>
+          <p:cNvPicPr>
+            <a:picLocks noChangeAspect="1"/>
+          </p:cNvPicPr>
+          <p:nvPr/>
+        </p:nvPicPr>
+        <p:blipFill>
+          <a:blip r:embed="rId13"/>
+          <a:stretch>
+            <a:fillRect/>
+          </a:stretch>
+        </p:blipFill>
+        <p:spPr>
+          <a:xfrm>
+            <a:off x="500642" y="7541045"/>
+            <a:ext cx="2463800" cy="1555750"/>
+          </a:xfrm>
+          <a:prstGeom prst="rect">
+            <a:avLst/>
+          </a:prstGeom>
+        </p:spPr>
+      </p:pic>
+      <p:sp>
+        <p:nvSpPr>
+          <p:cNvPr id="27" name="TextBox 26">
+            <a:extLst>
+              <a:ext uri="{FF2B5EF4-FFF2-40B4-BE49-F238E27FC236}">
+                <a16:creationId xmlns:a16="http://schemas.microsoft.com/office/drawing/2014/main" id="{639185B2-E861-65C0-4B61-C2F84493561B}"/>
+              </a:ext>
+            </a:extLst>
+          </p:cNvPr>
+          <p:cNvSpPr txBox="1"/>
+          <p:nvPr/>
+        </p:nvSpPr>
+        <p:spPr>
+          <a:xfrm>
+            <a:off x="47714" y="7387156"/>
             <a:ext cx="645459" cy="307777"/>
           </a:xfrm>
           <a:prstGeom prst="rect">
@@ -5149,7 +5214,7 @@
         <p:spPr>
           <a:xfrm>
             <a:off x="0" y="0"/>
-            <a:ext cx="6858000" cy="1446550"/>
+            <a:ext cx="6858000" cy="1615827"/>
           </a:xfrm>
           <a:prstGeom prst="rect">
             <a:avLst/>
@@ -5174,7 +5239,7 @@
           <a:p>
             <a:r>
               <a:rPr lang="en-US" sz="1100" dirty="0"/>
-              <a:t>(a) Drug sensitivity categorization criteria provided to panel of experts. (b) Rating from expert 1-3, and the consensus (majority voting) for each drug category. (c) Training/validation cross-entropy loss (left axis) and validation balanced accuracy (right axis) across epochs for each of the five outer cross-validation folds (Fold 0–4) used in the image-based drug-response classification; the checkpoint with the best validation balanced accuracy (star) in each fold was reloaded and used for evaluation on that fold's held-out test partition. (d) </a:t>
+              <a:t>(a) Drug sensitivity categorization criteria provided to panel of experts. (b) Rating from expert 1-3, and the consensus (majority voting) for each drug category. (c) Training/validation cross-entropy loss (left axis) and validation balanced accuracy (right axis) across epochs for each of the five outer cross-validation folds (Fold 0–4) used in the image-based drug-response classification; the checkpoint with the best validation balanced accuracy (star) in each fold was reloaded and used for evaluation on that fold's held-out test partition. (d) F1 score per category comparing ResNet18 and Random Forest models. (e) </a:t>
             </a:r>
             <a:r>
               <a:rPr lang="en-CA" sz="1100" dirty="0"/>

--- a/figures_tables/Supplemental_Figures/Supp_Figures.pptx
+++ b/figures_tables/Supplemental_Figures/Supp_Figures.pptx
@@ -3432,6 +3432,36 @@
           <a:chExt cx="0" cy="0"/>
         </a:xfrm>
       </p:grpSpPr>
+      <p:pic>
+        <p:nvPicPr>
+          <p:cNvPr id="29" name="Picture 28">
+            <a:extLst>
+              <a:ext uri="{FF2B5EF4-FFF2-40B4-BE49-F238E27FC236}">
+                <a16:creationId xmlns:a16="http://schemas.microsoft.com/office/drawing/2014/main" id="{AD902D88-38E0-718F-857F-81FC15FD038F}"/>
+              </a:ext>
+            </a:extLst>
+          </p:cNvPr>
+          <p:cNvPicPr>
+            <a:picLocks noChangeAspect="1"/>
+          </p:cNvPicPr>
+          <p:nvPr/>
+        </p:nvPicPr>
+        <p:blipFill>
+          <a:blip r:embed="rId2"/>
+          <a:stretch>
+            <a:fillRect/>
+          </a:stretch>
+        </p:blipFill>
+        <p:spPr>
+          <a:xfrm>
+            <a:off x="0" y="4446715"/>
+            <a:ext cx="6858000" cy="3123093"/>
+          </a:xfrm>
+          <a:prstGeom prst="rect">
+            <a:avLst/>
+          </a:prstGeom>
+        </p:spPr>
+      </p:pic>
       <p:sp>
         <p:nvSpPr>
           <p:cNvPr id="4" name="Rectangle 3">
@@ -3481,156 +3511,6 @@
           </a:p>
         </p:txBody>
       </p:sp>
-      <p:pic>
-        <p:nvPicPr>
-          <p:cNvPr id="5" name="Picture 4">
-            <a:extLst>
-              <a:ext uri="{FF2B5EF4-FFF2-40B4-BE49-F238E27FC236}">
-                <a16:creationId xmlns:a16="http://schemas.microsoft.com/office/drawing/2014/main" id="{5CF0CB17-BBE4-F42B-9244-54B729FE723B}"/>
-              </a:ext>
-            </a:extLst>
-          </p:cNvPr>
-          <p:cNvPicPr>
-            <a:picLocks noChangeAspect="1"/>
-          </p:cNvPicPr>
-          <p:nvPr/>
-        </p:nvPicPr>
-        <p:blipFill>
-          <a:blip r:embed="rId2"/>
-          <a:stretch>
-            <a:fillRect/>
-          </a:stretch>
-        </p:blipFill>
-        <p:spPr>
-          <a:xfrm>
-            <a:off x="51718" y="4584060"/>
-            <a:ext cx="2263342" cy="1508895"/>
-          </a:xfrm>
-          <a:prstGeom prst="rect">
-            <a:avLst/>
-          </a:prstGeom>
-        </p:spPr>
-      </p:pic>
-      <p:pic>
-        <p:nvPicPr>
-          <p:cNvPr id="6" name="Picture 5">
-            <a:extLst>
-              <a:ext uri="{FF2B5EF4-FFF2-40B4-BE49-F238E27FC236}">
-                <a16:creationId xmlns:a16="http://schemas.microsoft.com/office/drawing/2014/main" id="{AD5FABC3-FBF3-7581-4F53-2B83A7B6BF98}"/>
-              </a:ext>
-            </a:extLst>
-          </p:cNvPr>
-          <p:cNvPicPr>
-            <a:picLocks noChangeAspect="1"/>
-          </p:cNvPicPr>
-          <p:nvPr/>
-        </p:nvPicPr>
-        <p:blipFill>
-          <a:blip r:embed="rId3"/>
-          <a:stretch>
-            <a:fillRect/>
-          </a:stretch>
-        </p:blipFill>
-        <p:spPr>
-          <a:xfrm>
-            <a:off x="2315060" y="4593548"/>
-            <a:ext cx="2263343" cy="1508895"/>
-          </a:xfrm>
-          <a:prstGeom prst="rect">
-            <a:avLst/>
-          </a:prstGeom>
-        </p:spPr>
-      </p:pic>
-      <p:pic>
-        <p:nvPicPr>
-          <p:cNvPr id="7" name="Picture 6">
-            <a:extLst>
-              <a:ext uri="{FF2B5EF4-FFF2-40B4-BE49-F238E27FC236}">
-                <a16:creationId xmlns:a16="http://schemas.microsoft.com/office/drawing/2014/main" id="{0BEF172D-6F95-F8CA-CE4C-9A8D51CA5B33}"/>
-              </a:ext>
-            </a:extLst>
-          </p:cNvPr>
-          <p:cNvPicPr>
-            <a:picLocks noChangeAspect="1"/>
-          </p:cNvPicPr>
-          <p:nvPr/>
-        </p:nvPicPr>
-        <p:blipFill>
-          <a:blip r:embed="rId4"/>
-          <a:stretch>
-            <a:fillRect/>
-          </a:stretch>
-        </p:blipFill>
-        <p:spPr>
-          <a:xfrm>
-            <a:off x="4594657" y="4584060"/>
-            <a:ext cx="2263343" cy="1508895"/>
-          </a:xfrm>
-          <a:prstGeom prst="rect">
-            <a:avLst/>
-          </a:prstGeom>
-        </p:spPr>
-      </p:pic>
-      <p:pic>
-        <p:nvPicPr>
-          <p:cNvPr id="8" name="Picture 7">
-            <a:extLst>
-              <a:ext uri="{FF2B5EF4-FFF2-40B4-BE49-F238E27FC236}">
-                <a16:creationId xmlns:a16="http://schemas.microsoft.com/office/drawing/2014/main" id="{E61324DB-072A-D040-AA5E-4A183D65263B}"/>
-              </a:ext>
-            </a:extLst>
-          </p:cNvPr>
-          <p:cNvPicPr>
-            <a:picLocks noChangeAspect="1"/>
-          </p:cNvPicPr>
-          <p:nvPr/>
-        </p:nvPicPr>
-        <p:blipFill>
-          <a:blip r:embed="rId5"/>
-          <a:stretch>
-            <a:fillRect/>
-          </a:stretch>
-        </p:blipFill>
-        <p:spPr>
-          <a:xfrm>
-            <a:off x="63116" y="6042184"/>
-            <a:ext cx="2263343" cy="1508895"/>
-          </a:xfrm>
-          <a:prstGeom prst="rect">
-            <a:avLst/>
-          </a:prstGeom>
-        </p:spPr>
-      </p:pic>
-      <p:pic>
-        <p:nvPicPr>
-          <p:cNvPr id="9" name="Picture 8">
-            <a:extLst>
-              <a:ext uri="{FF2B5EF4-FFF2-40B4-BE49-F238E27FC236}">
-                <a16:creationId xmlns:a16="http://schemas.microsoft.com/office/drawing/2014/main" id="{49955E5B-6A19-A27D-0FB3-4C223488B61C}"/>
-              </a:ext>
-            </a:extLst>
-          </p:cNvPr>
-          <p:cNvPicPr>
-            <a:picLocks noChangeAspect="1"/>
-          </p:cNvPicPr>
-          <p:nvPr/>
-        </p:nvPicPr>
-        <p:blipFill>
-          <a:blip r:embed="rId6"/>
-          <a:stretch>
-            <a:fillRect/>
-          </a:stretch>
-        </p:blipFill>
-        <p:spPr>
-          <a:xfrm>
-            <a:off x="2315060" y="6042184"/>
-            <a:ext cx="2263343" cy="1508895"/>
-          </a:xfrm>
-          <a:prstGeom prst="rect">
-            <a:avLst/>
-          </a:prstGeom>
-        </p:spPr>
-      </p:pic>
       <p:grpSp>
         <p:nvGrpSpPr>
           <p:cNvPr id="10" name="Group 9">
@@ -3666,7 +3546,7 @@
             <p:nvPr/>
           </p:nvPicPr>
           <p:blipFill>
-            <a:blip r:embed="rId7"/>
+            <a:blip r:embed="rId3"/>
             <a:stretch>
               <a:fillRect/>
             </a:stretch>
@@ -3696,7 +3576,7 @@
             <p:nvPr/>
           </p:nvPicPr>
           <p:blipFill>
-            <a:blip r:embed="rId8"/>
+            <a:blip r:embed="rId4"/>
             <a:stretch>
               <a:fillRect/>
             </a:stretch>
@@ -3726,7 +3606,7 @@
             <p:nvPr/>
           </p:nvPicPr>
           <p:blipFill>
-            <a:blip r:embed="rId9"/>
+            <a:blip r:embed="rId5"/>
             <a:stretch>
               <a:fillRect/>
             </a:stretch>
@@ -3756,7 +3636,7 @@
             <p:nvPr/>
           </p:nvPicPr>
           <p:blipFill>
-            <a:blip r:embed="rId10"/>
+            <a:blip r:embed="rId6"/>
             <a:stretch>
               <a:fillRect/>
             </a:stretch>
@@ -3786,7 +3666,7 @@
             <p:nvPr/>
           </p:nvPicPr>
           <p:blipFill>
-            <a:blip r:embed="rId11"/>
+            <a:blip r:embed="rId7"/>
             <a:stretch>
               <a:fillRect/>
             </a:stretch>
@@ -5054,7 +4934,7 @@
           <p:nvPr/>
         </p:nvPicPr>
         <p:blipFill>
-          <a:blip r:embed="rId12"/>
+          <a:blip r:embed="rId8"/>
           <a:stretch>
             <a:fillRect/>
           </a:stretch>
@@ -5119,7 +4999,7 @@
           <p:nvPr/>
         </p:nvPicPr>
         <p:blipFill>
-          <a:blip r:embed="rId13"/>
+          <a:blip r:embed="rId9"/>
           <a:stretch>
             <a:fillRect/>
           </a:stretch>
